--- a/classes/parte-6-sistemas-de-recomendacion/217-factorizacion-de-matrices-svd-als/clase-217-factorizacion-de-matrices-svd-als-presentacion.pptx
+++ b/classes/parte-6-sistemas-de-recomendacion/217-factorizacion-de-matrices-svd-als/clase-217-factorizacion-de-matrices-svd-als-presentacion.pptx
@@ -3272,7 +3272,7 @@
                 </a:solidFill>
                 <a:latin typeface="Segoe UI"/>
               </a:rPr>
-              <a:t>Parte: 6 — Sistemas de Recomendación · Fuente: Koren, Bell, Volinsky Matrix Factorization Techniques for Recommender Systems (IEEE Computer, 2009) + Hu, Koren, Volinsky Collaborative Filtering for Implicit Feedback Datasets (ICDM 2008).  Duración estimada: 80 min.</a:t>
+              <a:t>Parte: 6 — Sistemas de Recomendación · Fuente: Koren, Bell, Volinsky Matrix Factorization Techniques for Recommender Systems (IEEE Computer, 2009) + Hu, Koren, Volinsky Collaborative Filtering for Implicit Feedback Datasets (ICDM 2008).  Duración estimada: 80 min. · Nivel: Intermedio-Avanzado</a:t>
             </a:r>
           </a:p>
         </p:txBody>
@@ -3581,7 +3581,7 @@
                 </a:solidFill>
                 <a:latin typeface="Segoe UI"/>
               </a:rPr>
-              <a:t>Parte: 6 — Sistemas de Recomendación · Fuente: Koren, Bell, Volinsky Matrix Factorization Techniques for Recommender Systems (IEEE Computer, 2009) + Hu, Koren, Volinsky Collaborative Filtering for Implicit Feedback Datasets (ICDM 2008).  Duración estimada: 80 min.</a:t>
+              <a:t>Parte: 6 — Sistemas de Recomendación · Fuente: Koren, Bell, Volinsky Matrix Factorization Techniques for Recommender Systems (IEEE Computer, 2009) + Hu, Koren, Volinsky Collaborative Filtering for Implicit Feedback Datasets (ICDM 2008).  Duración estimada: 80 min. · Nivel: Intermedio-Avanzado</a:t>
             </a:r>
           </a:p>
         </p:txBody>
@@ -4823,7 +4823,7 @@
                 </a:solidFill>
                 <a:latin typeface="Segoe UI"/>
               </a:rPr>
-              <a:t>Requiere: pip install scipy scikit-learn implicit. Sobre dataset sintético similar a MovieLens 100K.</a:t>
+              <a:t>**Factorizar una matriz es descomponer la tabla usuario × item en dos matrices más chicas de "gustos latentes".** Imaginá la tabla gigante de quién calificó qué (llena de huecos). La factorización dice: cada usuario se resume en un vector de pocos números —cuánto le gustan</a:t>
             </a:r>
           </a:p>
         </p:txBody>
